--- a/slides/tomato_leaf_disease_detection.pptx
+++ b/slides/tomato_leaf_disease_detection.pptx
@@ -949,7 +949,7 @@
           <a:p>
             <a:r>
               <a:rPr lang="en-US" dirty="0"/>
-              <a:t>The test set was used only here, never to choose a model. Fine-tuned MobileNetV2 and frozen ResNet50 are basically tied: 96.8 vs 96.7 percent accuracy, which is about 3 images. ResNet50 has slightly higher macro-F1, so it does a bit better on small classes. Top-3 accuracy is 99.7 percent, so the right answer is almost always in the top 3, which is why the app shows three. The weakest class is Early blight, 78 of 100 found, mostly confused with Target spot because both show brown ringed spots. The most dangerous mistake is calling a sick leaf healthy: MobileNetV2 does that 7 times out of 1,665 diseased leaves, ResNet50 13 times. That plus its size, 8.7 MB vs 90 MB, is why the app uses MobileNetV2. Latency is about the same for both, so size is the reason, not speed.</a:t>
+              <a:t>The test set was used only here, never to choose a model. Fine-tuned MobileNetV2 and frozen ResNet50 are basically tied: 96.8 vs 96.7 percent accuracy, which is about 3 images. ResNet50 has slightly higher macro-F1, so it does a bit better on small classes. Top-3 accuracy is 99.7 percent, so the right answer is almost always in the top 3, which is why the app shows three. The weakest class is Early blight, 78 of 100 found, mostly confused with Target spot because both show brown ringed spots. The most dangerous mistake is calling a sick leaf healthy: MobileNetV2 does that 7 times out of 1,665 diseased leaves, ResNet50 13 times. That plus its size, 2.3 million vs 23.6 million parameters, is why the app uses MobileNetV2. Latency is about the same for both, so size is the reason, not speed.</a:t>
             </a:r>
             <a:endParaRPr lang="en-US" dirty="0"/>
           </a:p>
@@ -1232,7 +1232,7 @@
         <p:spPr>
           <a:xfrm>
             <a:off x="812800" y="812800"/>
-            <a:ext cx="10566400" cy="502890"/>
+            <a:ext cx="10566400" cy="502841"/>
           </a:xfrm>
           <a:prstGeom prst="rect">
             <a:avLst/>
@@ -1279,8 +1279,8 @@
         </p:nvSpPr>
         <p:spPr>
           <a:xfrm>
-            <a:off x="812800" y="1620490"/>
-            <a:ext cx="10566400" cy="4424710"/>
+            <a:off x="812800" y="1620441"/>
+            <a:ext cx="10566400" cy="4424759"/>
           </a:xfrm>
           <a:prstGeom prst="rect">
             <a:avLst/>
@@ -1360,7 +1360,7 @@
         <p:spPr>
           <a:xfrm>
             <a:off x="812800" y="812800"/>
-            <a:ext cx="10566400" cy="502890"/>
+            <a:ext cx="10566400" cy="502841"/>
           </a:xfrm>
           <a:prstGeom prst="rect">
             <a:avLst/>
@@ -1407,8 +1407,8 @@
         </p:nvSpPr>
         <p:spPr>
           <a:xfrm>
-            <a:off x="812800" y="1620490"/>
-            <a:ext cx="10566400" cy="4424710"/>
+            <a:off x="812800" y="1620441"/>
+            <a:ext cx="10566400" cy="4424759"/>
           </a:xfrm>
           <a:prstGeom prst="rect">
             <a:avLst/>
@@ -1739,7 +1739,7 @@
         <p:spPr>
           <a:xfrm>
             <a:off x="812800" y="812800"/>
-            <a:ext cx="10883392" cy="274290"/>
+            <a:ext cx="10883392" cy="274241"/>
           </a:xfrm>
           <a:prstGeom prst="rect">
             <a:avLst/>
@@ -1785,7 +1785,7 @@
         <p:spPr>
           <a:xfrm>
             <a:off x="812800" y="2655590"/>
-            <a:ext cx="11379200" cy="718790"/>
+            <a:ext cx="11379200" cy="718741"/>
           </a:xfrm>
           <a:prstGeom prst="rect">
             <a:avLst/>
@@ -1828,7 +1828,7 @@
         </p:nvSpPr>
         <p:spPr>
           <a:xfrm>
-            <a:off x="812800" y="3552180"/>
+            <a:off x="812800" y="3552130"/>
             <a:ext cx="10883392" cy="355600"/>
           </a:xfrm>
           <a:prstGeom prst="rect">
@@ -1927,8 +1927,8 @@
         </p:nvSpPr>
         <p:spPr>
           <a:xfrm>
-            <a:off x="9994106" y="5547420"/>
-            <a:ext cx="1385094" cy="523180"/>
+            <a:off x="9994106" y="5547519"/>
+            <a:ext cx="1385094" cy="523081"/>
           </a:xfrm>
           <a:prstGeom prst="rect">
             <a:avLst/>
@@ -2026,7 +2026,7 @@
         <p:spPr>
           <a:xfrm>
             <a:off x="812800" y="812800"/>
-            <a:ext cx="10883392" cy="528290"/>
+            <a:ext cx="10883392" cy="528241"/>
           </a:xfrm>
           <a:prstGeom prst="rect">
             <a:avLst/>
@@ -2069,12 +2069,12 @@
         </p:nvSpPr>
         <p:spPr>
           <a:xfrm>
-            <a:off x="812800" y="1620490"/>
-            <a:ext cx="2070100" cy="1183580"/>
+            <a:off x="812800" y="1620441"/>
+            <a:ext cx="2070100" cy="1183481"/>
           </a:xfrm>
           <a:prstGeom prst="roundRect">
             <a:avLst>
-              <a:gd name="adj" fmla="val 8584"/>
+              <a:gd name="adj" fmla="val 8585"/>
             </a:avLst>
           </a:prstGeom>
           <a:solidFill>
@@ -2091,7 +2091,7 @@
         </p:nvSpPr>
         <p:spPr>
           <a:xfrm>
-            <a:off x="990600" y="1772890"/>
+            <a:off x="990600" y="1772841"/>
             <a:ext cx="1765935" cy="416520"/>
           </a:xfrm>
           <a:prstGeom prst="rect">
@@ -2135,8 +2135,8 @@
         </p:nvSpPr>
         <p:spPr>
           <a:xfrm>
-            <a:off x="990600" y="2189411"/>
-            <a:ext cx="1765935" cy="487660"/>
+            <a:off x="990600" y="2189361"/>
+            <a:ext cx="1765935" cy="487561"/>
           </a:xfrm>
           <a:prstGeom prst="rect">
             <a:avLst/>
@@ -2186,7 +2186,7 @@
         </p:blipFill>
         <p:spPr>
           <a:xfrm>
-            <a:off x="3035300" y="2085280"/>
+            <a:off x="3035300" y="2085181"/>
             <a:ext cx="254000" cy="254000"/>
           </a:xfrm>
           <a:prstGeom prst="rect">
@@ -2202,12 +2202,12 @@
         </p:nvSpPr>
         <p:spPr>
           <a:xfrm>
-            <a:off x="3441700" y="1620490"/>
-            <a:ext cx="2070100" cy="1183580"/>
+            <a:off x="3441700" y="1620441"/>
+            <a:ext cx="2070100" cy="1183481"/>
           </a:xfrm>
           <a:prstGeom prst="roundRect">
             <a:avLst>
-              <a:gd name="adj" fmla="val 8584"/>
+              <a:gd name="adj" fmla="val 8585"/>
             </a:avLst>
           </a:prstGeom>
           <a:solidFill>
@@ -2224,7 +2224,7 @@
         </p:nvSpPr>
         <p:spPr>
           <a:xfrm>
-            <a:off x="3619500" y="1772890"/>
+            <a:off x="3619500" y="1772841"/>
             <a:ext cx="1765935" cy="416520"/>
           </a:xfrm>
           <a:prstGeom prst="rect">
@@ -2268,8 +2268,8 @@
         </p:nvSpPr>
         <p:spPr>
           <a:xfrm>
-            <a:off x="3619500" y="2189411"/>
-            <a:ext cx="1765935" cy="487660"/>
+            <a:off x="3619500" y="2189361"/>
+            <a:ext cx="1765935" cy="487561"/>
           </a:xfrm>
           <a:prstGeom prst="rect">
             <a:avLst/>
@@ -2319,8 +2319,8 @@
           </p:nvPr>
         </p:nvGraphicFramePr>
         <p:xfrm>
-          <a:off x="825500" y="3019971"/>
-          <a:ext cx="4686300" cy="1930053"/>
+          <a:off x="825500" y="3019822"/>
+          <a:ext cx="4686300" cy="1929805"/>
         </p:xfrm>
         <a:graphic>
           <a:graphicData uri="http://schemas.openxmlformats.org/drawingml/2006/table">
@@ -2331,7 +2331,7 @@
                 <a:gridCol w="1405890"/>
                 <a:gridCol w="1405890"/>
               </a:tblGrid>
-              <a:tr h="386011">
+              <a:tr h="385961">
                 <a:tc>
                   <a:txBody>
                     <a:bodyPr/>
@@ -2546,7 +2546,7 @@
                   </a:tcPr>
                 </a:tc>
               </a:tr>
-              <a:tr h="386011">
+              <a:tr h="385961">
                 <a:tc>
                   <a:txBody>
                     <a:bodyPr/>
@@ -2752,7 +2752,7 @@
                   </a:tcPr>
                 </a:tc>
               </a:tr>
-              <a:tr h="386011">
+              <a:tr h="385961">
                 <a:tc>
                   <a:txBody>
                     <a:bodyPr/>
@@ -2958,7 +2958,7 @@
                   </a:tcPr>
                 </a:tc>
               </a:tr>
-              <a:tr h="386011">
+              <a:tr h="385961">
                 <a:tc>
                   <a:txBody>
                     <a:bodyPr/>
@@ -3164,7 +3164,7 @@
                   </a:tcPr>
                 </a:tc>
               </a:tr>
-              <a:tr h="386011">
+              <a:tr h="385961">
                 <a:tc>
                   <a:txBody>
                     <a:bodyPr/>
@@ -3391,8 +3391,8 @@
         </p:nvSpPr>
         <p:spPr>
           <a:xfrm>
-            <a:off x="812800" y="5153223"/>
-            <a:ext cx="4839970" cy="487660"/>
+            <a:off x="812800" y="5152827"/>
+            <a:ext cx="4839970" cy="487561"/>
           </a:xfrm>
           <a:prstGeom prst="rect">
             <a:avLst/>
@@ -3435,7 +3435,7 @@
         </p:nvSpPr>
         <p:spPr>
           <a:xfrm>
-            <a:off x="5921375" y="1623665"/>
+            <a:off x="5921375" y="1623616"/>
             <a:ext cx="5454650" cy="3204170"/>
           </a:xfrm>
           <a:prstGeom prst="roundRect">
@@ -3469,7 +3469,7 @@
         </p:blipFill>
         <p:spPr>
           <a:xfrm>
-            <a:off x="6076950" y="1779240"/>
+            <a:off x="6076950" y="1779191"/>
             <a:ext cx="5156200" cy="2578100"/>
           </a:xfrm>
           <a:prstGeom prst="rect">
@@ -3485,7 +3485,7 @@
         </p:nvSpPr>
         <p:spPr>
           <a:xfrm>
-            <a:off x="6076950" y="4458940"/>
+            <a:off x="6076950" y="4458891"/>
             <a:ext cx="5297805" cy="238720"/>
           </a:xfrm>
           <a:prstGeom prst="rect">
@@ -3608,7 +3608,7 @@
         <p:spPr>
           <a:xfrm>
             <a:off x="812800" y="812800"/>
-            <a:ext cx="10883392" cy="528290"/>
+            <a:ext cx="10883392" cy="528241"/>
           </a:xfrm>
           <a:prstGeom prst="rect">
             <a:avLst/>
@@ -3651,7 +3651,7 @@
         </p:nvSpPr>
         <p:spPr>
           <a:xfrm>
-            <a:off x="815975" y="1623665"/>
+            <a:off x="815975" y="1623616"/>
             <a:ext cx="5835650" cy="3140670"/>
           </a:xfrm>
           <a:prstGeom prst="roundRect">
@@ -3685,7 +3685,7 @@
         </p:blipFill>
         <p:spPr>
           <a:xfrm>
-            <a:off x="971550" y="1779240"/>
+            <a:off x="971550" y="1779191"/>
             <a:ext cx="5537200" cy="2514600"/>
           </a:xfrm>
           <a:prstGeom prst="rect">
@@ -3701,7 +3701,7 @@
         </p:nvSpPr>
         <p:spPr>
           <a:xfrm>
-            <a:off x="971550" y="4395440"/>
+            <a:off x="971550" y="4395391"/>
             <a:ext cx="5690235" cy="238720"/>
           </a:xfrm>
           <a:prstGeom prst="rect">
@@ -3745,12 +3745,12 @@
         </p:nvSpPr>
         <p:spPr>
           <a:xfrm>
-            <a:off x="6959600" y="1620490"/>
-            <a:ext cx="4419600" cy="1061690"/>
+            <a:off x="6959600" y="1620441"/>
+            <a:ext cx="4419600" cy="1061541"/>
           </a:xfrm>
           <a:prstGeom prst="roundRect">
             <a:avLst>
-              <a:gd name="adj" fmla="val 9570"/>
+              <a:gd name="adj" fmla="val 9571"/>
             </a:avLst>
           </a:prstGeom>
           <a:solidFill>
@@ -3767,8 +3767,8 @@
         </p:nvSpPr>
         <p:spPr>
           <a:xfrm>
-            <a:off x="7137400" y="1772890"/>
-            <a:ext cx="4185920" cy="269230"/>
+            <a:off x="7137400" y="1772841"/>
+            <a:ext cx="4185920" cy="269180"/>
           </a:xfrm>
           <a:prstGeom prst="rect">
             <a:avLst/>
@@ -3811,8 +3811,8 @@
         </p:nvSpPr>
         <p:spPr>
           <a:xfrm>
-            <a:off x="7137400" y="2067520"/>
-            <a:ext cx="4185920" cy="487660"/>
+            <a:off x="7137400" y="2067421"/>
+            <a:ext cx="4185920" cy="487561"/>
           </a:xfrm>
           <a:prstGeom prst="rect">
             <a:avLst/>
@@ -3855,12 +3855,12 @@
         </p:nvSpPr>
         <p:spPr>
           <a:xfrm>
-            <a:off x="6959600" y="2834580"/>
-            <a:ext cx="4419600" cy="1292820"/>
+            <a:off x="6959600" y="2834382"/>
+            <a:ext cx="4419600" cy="1292622"/>
           </a:xfrm>
           <a:prstGeom prst="roundRect">
             <a:avLst>
-              <a:gd name="adj" fmla="val 7859"/>
+              <a:gd name="adj" fmla="val 7860"/>
             </a:avLst>
           </a:prstGeom>
           <a:solidFill>
@@ -3877,8 +3877,8 @@
         </p:nvSpPr>
         <p:spPr>
           <a:xfrm>
-            <a:off x="7137400" y="2986980"/>
-            <a:ext cx="4185920" cy="269230"/>
+            <a:off x="7137400" y="2986782"/>
+            <a:ext cx="4185920" cy="269180"/>
           </a:xfrm>
           <a:prstGeom prst="rect">
             <a:avLst/>
@@ -3921,8 +3921,8 @@
         </p:nvSpPr>
         <p:spPr>
           <a:xfrm>
-            <a:off x="7137400" y="3281611"/>
-            <a:ext cx="4185920" cy="718790"/>
+            <a:off x="7137400" y="3281363"/>
+            <a:ext cx="4185920" cy="718641"/>
           </a:xfrm>
           <a:prstGeom prst="rect">
             <a:avLst/>
@@ -3965,12 +3965,12 @@
         </p:nvSpPr>
         <p:spPr>
           <a:xfrm>
-            <a:off x="6959600" y="4279801"/>
-            <a:ext cx="4419600" cy="1292820"/>
+            <a:off x="6959600" y="4279404"/>
+            <a:ext cx="4419600" cy="1292622"/>
           </a:xfrm>
           <a:prstGeom prst="roundRect">
             <a:avLst>
-              <a:gd name="adj" fmla="val 7859"/>
+              <a:gd name="adj" fmla="val 7860"/>
             </a:avLst>
           </a:prstGeom>
           <a:solidFill>
@@ -3987,8 +3987,8 @@
         </p:nvSpPr>
         <p:spPr>
           <a:xfrm>
-            <a:off x="7137400" y="4432201"/>
-            <a:ext cx="4185920" cy="269230"/>
+            <a:off x="7137400" y="4431804"/>
+            <a:ext cx="4185920" cy="269180"/>
           </a:xfrm>
           <a:prstGeom prst="rect">
             <a:avLst/>
@@ -4031,8 +4031,8 @@
         </p:nvSpPr>
         <p:spPr>
           <a:xfrm>
-            <a:off x="7137400" y="4726831"/>
-            <a:ext cx="4185920" cy="718790"/>
+            <a:off x="7137400" y="4726384"/>
+            <a:ext cx="4185920" cy="718641"/>
           </a:xfrm>
           <a:prstGeom prst="rect">
             <a:avLst/>
@@ -4154,7 +4154,7 @@
         <p:spPr>
           <a:xfrm>
             <a:off x="812800" y="812800"/>
-            <a:ext cx="10883392" cy="528290"/>
+            <a:ext cx="10883392" cy="528241"/>
           </a:xfrm>
           <a:prstGeom prst="rect">
             <a:avLst/>
@@ -4197,8 +4197,8 @@
         </p:nvSpPr>
         <p:spPr>
           <a:xfrm>
-            <a:off x="815975" y="1623665"/>
-            <a:ext cx="3380284" cy="3011041"/>
+            <a:off x="815975" y="1623616"/>
+            <a:ext cx="3380284" cy="3010793"/>
           </a:xfrm>
           <a:prstGeom prst="roundRect">
             <a:avLst>
@@ -4224,7 +4224,7 @@
         </p:nvSpPr>
         <p:spPr>
           <a:xfrm>
-            <a:off x="1073150" y="1880840"/>
+            <a:off x="1073150" y="1880791"/>
             <a:ext cx="2951912" cy="330200"/>
           </a:xfrm>
           <a:prstGeom prst="rect">
@@ -4268,8 +4268,8 @@
         </p:nvSpPr>
         <p:spPr>
           <a:xfrm>
-            <a:off x="1073150" y="2287240"/>
-            <a:ext cx="2951912" cy="256530"/>
+            <a:off x="1073150" y="2287191"/>
+            <a:ext cx="2951912" cy="256480"/>
           </a:xfrm>
           <a:prstGeom prst="rect">
             <a:avLst/>
@@ -4312,8 +4312,8 @@
         </p:nvSpPr>
         <p:spPr>
           <a:xfrm>
-            <a:off x="1073150" y="2619970"/>
-            <a:ext cx="2951912" cy="472430"/>
+            <a:off x="1073150" y="2619871"/>
+            <a:ext cx="2951912" cy="472380"/>
           </a:xfrm>
           <a:prstGeom prst="rect">
             <a:avLst/>
@@ -4356,7 +4356,7 @@
         </p:nvSpPr>
         <p:spPr>
           <a:xfrm>
-            <a:off x="1073150" y="3168600"/>
+            <a:off x="1073150" y="3168452"/>
             <a:ext cx="2951912" cy="238720"/>
           </a:xfrm>
           <a:prstGeom prst="rect">
@@ -4400,8 +4400,8 @@
         </p:nvSpPr>
         <p:spPr>
           <a:xfrm>
-            <a:off x="1171194" y="3483521"/>
-            <a:ext cx="2846248" cy="718790"/>
+            <a:off x="1171194" y="3483372"/>
+            <a:ext cx="2846248" cy="718641"/>
           </a:xfrm>
           <a:prstGeom prst="rect">
             <a:avLst/>
@@ -4487,8 +4487,8 @@
         </p:nvSpPr>
         <p:spPr>
           <a:xfrm>
-            <a:off x="4402634" y="1620490"/>
-            <a:ext cx="3386683" cy="3017391"/>
+            <a:off x="4402634" y="1620441"/>
+            <a:ext cx="3386634" cy="3017143"/>
           </a:xfrm>
           <a:prstGeom prst="roundRect">
             <a:avLst>
@@ -4509,8 +4509,8 @@
         </p:nvSpPr>
         <p:spPr>
           <a:xfrm>
-            <a:off x="4656634" y="1874490"/>
-            <a:ext cx="2965044" cy="330200"/>
+            <a:off x="4656634" y="1874441"/>
+            <a:ext cx="2964993" cy="330200"/>
           </a:xfrm>
           <a:prstGeom prst="rect">
             <a:avLst/>
@@ -4553,8 +4553,8 @@
         </p:nvSpPr>
         <p:spPr>
           <a:xfrm>
-            <a:off x="4656634" y="2280890"/>
-            <a:ext cx="2965044" cy="256530"/>
+            <a:off x="4656634" y="2280841"/>
+            <a:ext cx="2964993" cy="256480"/>
           </a:xfrm>
           <a:prstGeom prst="rect">
             <a:avLst/>
@@ -4583,7 +4583,7 @@
                 <a:ea typeface="Arial" pitchFamily="34" charset="-122"/>
                 <a:cs typeface="Arial" pitchFamily="34" charset="-120"/>
               </a:rPr>
-              <a:t>ImageNet weights, 8.7 MB</a:t>
+              <a:t>ImageNet weights, 2.3M parameters</a:t>
             </a:r>
             <a:endParaRPr lang="en-US" sz="1300" dirty="0"/>
           </a:p>
@@ -4597,8 +4597,8 @@
         </p:nvSpPr>
         <p:spPr>
           <a:xfrm>
-            <a:off x="4656634" y="2613620"/>
-            <a:ext cx="2965044" cy="472430"/>
+            <a:off x="4656634" y="2613521"/>
+            <a:ext cx="2964993" cy="472380"/>
           </a:xfrm>
           <a:prstGeom prst="rect">
             <a:avLst/>
@@ -4641,8 +4641,8 @@
         </p:nvSpPr>
         <p:spPr>
           <a:xfrm>
-            <a:off x="4656634" y="3162250"/>
-            <a:ext cx="2965044" cy="452041"/>
+            <a:off x="4656634" y="3162102"/>
+            <a:ext cx="2964993" cy="452041"/>
           </a:xfrm>
           <a:prstGeom prst="rect">
             <a:avLst/>
@@ -4685,8 +4685,8 @@
         </p:nvSpPr>
         <p:spPr>
           <a:xfrm>
-            <a:off x="4754678" y="3690491"/>
-            <a:ext cx="2859380" cy="718790"/>
+            <a:off x="4754678" y="3690342"/>
+            <a:ext cx="2859329" cy="718641"/>
           </a:xfrm>
           <a:prstGeom prst="rect">
             <a:avLst/>
@@ -4772,8 +4772,8 @@
         </p:nvSpPr>
         <p:spPr>
           <a:xfrm>
-            <a:off x="7995692" y="1623665"/>
-            <a:ext cx="3380284" cy="3011041"/>
+            <a:off x="7995642" y="1623616"/>
+            <a:ext cx="3380284" cy="3010793"/>
           </a:xfrm>
           <a:prstGeom prst="roundRect">
             <a:avLst>
@@ -4799,7 +4799,7 @@
         </p:nvSpPr>
         <p:spPr>
           <a:xfrm>
-            <a:off x="8252867" y="1880840"/>
+            <a:off x="8252817" y="1880791"/>
             <a:ext cx="2951912" cy="330200"/>
           </a:xfrm>
           <a:prstGeom prst="rect">
@@ -4843,8 +4843,8 @@
         </p:nvSpPr>
         <p:spPr>
           <a:xfrm>
-            <a:off x="8252867" y="2287240"/>
-            <a:ext cx="2951912" cy="256530"/>
+            <a:off x="8252817" y="2287191"/>
+            <a:ext cx="2951912" cy="256480"/>
           </a:xfrm>
           <a:prstGeom prst="rect">
             <a:avLst/>
@@ -4873,7 +4873,7 @@
                 <a:ea typeface="Arial" pitchFamily="34" charset="-122"/>
                 <a:cs typeface="Arial" pitchFamily="34" charset="-120"/>
               </a:rPr>
-              <a:t>ImageNet weights, 90 MB</a:t>
+              <a:t>ImageNet weights, 23.6M parameters</a:t>
             </a:r>
             <a:endParaRPr lang="en-US" sz="1300" dirty="0"/>
           </a:p>
@@ -4887,8 +4887,8 @@
         </p:nvSpPr>
         <p:spPr>
           <a:xfrm>
-            <a:off x="8252867" y="2619970"/>
-            <a:ext cx="2951912" cy="472430"/>
+            <a:off x="8252817" y="2619871"/>
+            <a:ext cx="2951912" cy="472380"/>
           </a:xfrm>
           <a:prstGeom prst="rect">
             <a:avLst/>
@@ -4931,7 +4931,7 @@
         </p:nvSpPr>
         <p:spPr>
           <a:xfrm>
-            <a:off x="8252867" y="3168600"/>
+            <a:off x="8252817" y="3168452"/>
             <a:ext cx="2951912" cy="238720"/>
           </a:xfrm>
           <a:prstGeom prst="rect">
@@ -4975,8 +4975,8 @@
         </p:nvSpPr>
         <p:spPr>
           <a:xfrm>
-            <a:off x="8350911" y="3483521"/>
-            <a:ext cx="2846248" cy="718790"/>
+            <a:off x="8350861" y="3483372"/>
+            <a:ext cx="2846248" cy="718641"/>
           </a:xfrm>
           <a:prstGeom prst="rect">
             <a:avLst/>
@@ -5062,12 +5062,12 @@
         </p:nvSpPr>
         <p:spPr>
           <a:xfrm>
-            <a:off x="812800" y="4942681"/>
-            <a:ext cx="10566400" cy="767060"/>
+            <a:off x="812800" y="4942384"/>
+            <a:ext cx="10566400" cy="766961"/>
           </a:xfrm>
           <a:prstGeom prst="roundRect">
             <a:avLst>
-              <a:gd name="adj" fmla="val 13245"/>
+              <a:gd name="adj" fmla="val 13247"/>
             </a:avLst>
           </a:prstGeom>
           <a:solidFill>
@@ -5189,7 +5189,7 @@
         <p:spPr>
           <a:xfrm>
             <a:off x="812800" y="812800"/>
-            <a:ext cx="10883392" cy="528290"/>
+            <a:ext cx="10883392" cy="528241"/>
           </a:xfrm>
           <a:prstGeom prst="rect">
             <a:avLst/>
@@ -5232,8 +5232,8 @@
         </p:nvSpPr>
         <p:spPr>
           <a:xfrm>
-            <a:off x="812800" y="1620490"/>
-            <a:ext cx="10566400" cy="2527945"/>
+            <a:off x="812800" y="1620441"/>
+            <a:ext cx="10566400" cy="2527598"/>
           </a:xfrm>
           <a:prstGeom prst="rect">
             <a:avLst/>
@@ -5259,8 +5259,8 @@
           </p:nvPr>
         </p:nvGraphicFramePr>
         <p:xfrm>
-          <a:off x="825500" y="1633190"/>
-          <a:ext cx="10553700" cy="2515245"/>
+          <a:off x="825500" y="1633141"/>
+          <a:ext cx="10553700" cy="2514898"/>
         </p:xfrm>
         <a:graphic>
           <a:graphicData uri="http://schemas.openxmlformats.org/drawingml/2006/table">
@@ -5271,7 +5271,7 @@
                 <a:gridCol w="3799332"/>
                 <a:gridCol w="2743962"/>
               </a:tblGrid>
-              <a:tr h="359321">
+              <a:tr h="359271">
                 <a:tc>
                   <a:txBody>
                     <a:bodyPr/>
@@ -5486,7 +5486,7 @@
                   </a:tcPr>
                 </a:tc>
               </a:tr>
-              <a:tr h="359321">
+              <a:tr h="359271">
                 <a:tc>
                   <a:txBody>
                     <a:bodyPr/>
@@ -5692,7 +5692,7 @@
                   </a:tcPr>
                 </a:tc>
               </a:tr>
-              <a:tr h="359321">
+              <a:tr h="359271">
                 <a:tc>
                   <a:txBody>
                     <a:bodyPr/>
@@ -5898,7 +5898,7 @@
                   </a:tcPr>
                 </a:tc>
               </a:tr>
-              <a:tr h="359321">
+              <a:tr h="359271">
                 <a:tc>
                   <a:txBody>
                     <a:bodyPr/>
@@ -6104,7 +6104,7 @@
                   </a:tcPr>
                 </a:tc>
               </a:tr>
-              <a:tr h="359321">
+              <a:tr h="359271">
                 <a:tc>
                   <a:txBody>
                     <a:bodyPr/>
@@ -6310,7 +6310,7 @@
                   </a:tcPr>
                 </a:tc>
               </a:tr>
-              <a:tr h="359321">
+              <a:tr h="359271">
                 <a:tc>
                   <a:txBody>
                     <a:bodyPr/>
@@ -6525,7 +6525,7 @@
                   </a:tcPr>
                 </a:tc>
               </a:tr>
-              <a:tr h="359321">
+              <a:tr h="359271">
                 <a:tc>
                   <a:txBody>
                     <a:bodyPr/>
@@ -6743,8 +6743,8 @@
         </p:nvSpPr>
         <p:spPr>
           <a:xfrm>
-            <a:off x="812800" y="4453235"/>
-            <a:ext cx="10883392" cy="487660"/>
+            <a:off x="812800" y="4452838"/>
+            <a:ext cx="10883392" cy="487561"/>
           </a:xfrm>
           <a:prstGeom prst="rect">
             <a:avLst/>
@@ -6866,7 +6866,7 @@
         <p:spPr>
           <a:xfrm>
             <a:off x="812800" y="812800"/>
-            <a:ext cx="10883392" cy="528290"/>
+            <a:ext cx="10883392" cy="528241"/>
           </a:xfrm>
           <a:prstGeom prst="rect">
             <a:avLst/>
@@ -6916,8 +6916,8 @@
           </p:nvPr>
         </p:nvGraphicFramePr>
         <p:xfrm>
-          <a:off x="825500" y="1633190"/>
-          <a:ext cx="5930900" cy="2027734"/>
+          <a:off x="825500" y="1633141"/>
+          <a:ext cx="5930900" cy="2027436"/>
         </p:xfrm>
         <a:graphic>
           <a:graphicData uri="http://schemas.openxmlformats.org/drawingml/2006/table">
@@ -6930,7 +6930,7 @@
                 <a:gridCol w="889635"/>
                 <a:gridCol w="889635"/>
               </a:tblGrid>
-              <a:tr h="590451">
+              <a:tr h="590352">
                 <a:tc>
                   <a:txBody>
                     <a:bodyPr/>
@@ -7287,7 +7287,7 @@
                   </a:tcPr>
                 </a:tc>
               </a:tr>
-              <a:tr h="359321">
+              <a:tr h="359271">
                 <a:tc>
                   <a:txBody>
                     <a:bodyPr/>
@@ -7629,7 +7629,7 @@
                   </a:tcPr>
                 </a:tc>
               </a:tr>
-              <a:tr h="359321">
+              <a:tr h="359271">
                 <a:tc>
                   <a:txBody>
                     <a:bodyPr/>
@@ -7971,7 +7971,7 @@
                   </a:tcPr>
                 </a:tc>
               </a:tr>
-              <a:tr h="359321">
+              <a:tr h="359271">
                 <a:tc>
                   <a:txBody>
                     <a:bodyPr/>
@@ -8328,7 +8328,7 @@
                   </a:tcPr>
                 </a:tc>
               </a:tr>
-              <a:tr h="359321">
+              <a:tr h="359271">
                 <a:tc>
                   <a:txBody>
                     <a:bodyPr/>
@@ -8682,12 +8682,12 @@
         </p:nvSpPr>
         <p:spPr>
           <a:xfrm>
-            <a:off x="812800" y="3864124"/>
-            <a:ext cx="5943600" cy="1369020"/>
+            <a:off x="812800" y="3863777"/>
+            <a:ext cx="5943600" cy="1368822"/>
           </a:xfrm>
           <a:prstGeom prst="roundRect">
             <a:avLst>
-              <a:gd name="adj" fmla="val 7421"/>
+              <a:gd name="adj" fmla="val 7422"/>
             </a:avLst>
           </a:prstGeom>
           <a:solidFill>
@@ -8704,8 +8704,8 @@
         </p:nvSpPr>
         <p:spPr>
           <a:xfrm>
-            <a:off x="1016000" y="4041924"/>
-            <a:ext cx="5703316" cy="269230"/>
+            <a:off x="1016000" y="4041577"/>
+            <a:ext cx="5703316" cy="269180"/>
           </a:xfrm>
           <a:prstGeom prst="rect">
             <a:avLst/>
@@ -8748,8 +8748,8 @@
         </p:nvSpPr>
         <p:spPr>
           <a:xfrm>
-            <a:off x="1114044" y="4361954"/>
-            <a:ext cx="5597652" cy="718790"/>
+            <a:off x="1114044" y="4361557"/>
+            <a:ext cx="5597652" cy="718641"/>
           </a:xfrm>
           <a:prstGeom prst="rect">
             <a:avLst/>
@@ -8835,7 +8835,7 @@
         </p:nvSpPr>
         <p:spPr>
           <a:xfrm>
-            <a:off x="7064375" y="1623665"/>
+            <a:off x="7064375" y="1623616"/>
             <a:ext cx="4311650" cy="3917950"/>
           </a:xfrm>
           <a:prstGeom prst="roundRect">
@@ -8869,7 +8869,7 @@
         </p:blipFill>
         <p:spPr>
           <a:xfrm>
-            <a:off x="7194550" y="1753840"/>
+            <a:off x="7194550" y="1753791"/>
             <a:ext cx="4064000" cy="3657600"/>
           </a:xfrm>
           <a:prstGeom prst="rect">
@@ -8964,7 +8964,7 @@
         <p:spPr>
           <a:xfrm>
             <a:off x="812800" y="812800"/>
-            <a:ext cx="10883392" cy="528290"/>
+            <a:ext cx="10883392" cy="528241"/>
           </a:xfrm>
           <a:prstGeom prst="rect">
             <a:avLst/>
@@ -9007,8 +9007,8 @@
         </p:nvSpPr>
         <p:spPr>
           <a:xfrm>
-            <a:off x="812800" y="1569690"/>
-            <a:ext cx="1747490" cy="683220"/>
+            <a:off x="812800" y="1569641"/>
+            <a:ext cx="1747441" cy="683220"/>
           </a:xfrm>
           <a:prstGeom prst="roundRect">
             <a:avLst>
@@ -9062,7 +9062,7 @@
         </p:blipFill>
         <p:spPr>
           <a:xfrm>
-            <a:off x="2661890" y="1835100"/>
+            <a:off x="2661841" y="1835051"/>
             <a:ext cx="254000" cy="152400"/>
           </a:xfrm>
           <a:prstGeom prst="rect">
@@ -9078,7 +9078,7 @@
         </p:nvSpPr>
         <p:spPr>
           <a:xfrm>
-            <a:off x="3017490" y="1676995"/>
+            <a:off x="3017441" y="1676896"/>
             <a:ext cx="1747540" cy="468610"/>
           </a:xfrm>
           <a:prstGeom prst="roundRect">
@@ -9133,7 +9133,7 @@
         </p:blipFill>
         <p:spPr>
           <a:xfrm>
-            <a:off x="4866630" y="1835100"/>
+            <a:off x="4866580" y="1835051"/>
             <a:ext cx="254000" cy="152400"/>
           </a:xfrm>
           <a:prstGeom prst="rect">
@@ -9149,8 +9149,8 @@
         </p:nvSpPr>
         <p:spPr>
           <a:xfrm>
-            <a:off x="5222230" y="1569690"/>
-            <a:ext cx="1747490" cy="683220"/>
+            <a:off x="5222180" y="1569641"/>
+            <a:ext cx="1747540" cy="683220"/>
           </a:xfrm>
           <a:prstGeom prst="roundRect">
             <a:avLst>
@@ -9183,7 +9183,7 @@
                 <a:ea typeface="Arial" pitchFamily="34" charset="-122"/>
                 <a:cs typeface="Arial" pitchFamily="34" charset="-120"/>
               </a:rPr>
-              <a:t>MobileNetV2, 8.7 MB</a:t>
+              <a:t>MobileNetV2, 2.3M parameters</a:t>
             </a:r>
             <a:endParaRPr lang="en-US" sz="1300" dirty="0"/>
           </a:p>
@@ -9204,7 +9204,7 @@
         </p:blipFill>
         <p:spPr>
           <a:xfrm>
-            <a:off x="7071320" y="1835100"/>
+            <a:off x="7071320" y="1835051"/>
             <a:ext cx="254000" cy="152400"/>
           </a:xfrm>
           <a:prstGeom prst="rect">
@@ -9220,7 +9220,7 @@
         </p:nvSpPr>
         <p:spPr>
           <a:xfrm>
-            <a:off x="7426920" y="1569690"/>
+            <a:off x="7426920" y="1569641"/>
             <a:ext cx="1747540" cy="683220"/>
           </a:xfrm>
           <a:prstGeom prst="roundRect">
@@ -9275,7 +9275,7 @@
         </p:blipFill>
         <p:spPr>
           <a:xfrm>
-            <a:off x="9276060" y="1835100"/>
+            <a:off x="9276060" y="1835051"/>
             <a:ext cx="254000" cy="152400"/>
           </a:xfrm>
           <a:prstGeom prst="rect">
@@ -9291,7 +9291,7 @@
         </p:nvSpPr>
         <p:spPr>
           <a:xfrm>
-            <a:off x="9631660" y="1569690"/>
+            <a:off x="9631660" y="1569641"/>
             <a:ext cx="1747540" cy="683220"/>
           </a:xfrm>
           <a:prstGeom prst="roundRect">
@@ -9339,12 +9339,12 @@
         </p:nvSpPr>
         <p:spPr>
           <a:xfrm>
-            <a:off x="812800" y="2506911"/>
-            <a:ext cx="5397500" cy="1061690"/>
+            <a:off x="812800" y="2506861"/>
+            <a:ext cx="5397500" cy="1061541"/>
           </a:xfrm>
           <a:prstGeom prst="roundRect">
             <a:avLst>
-              <a:gd name="adj" fmla="val 9570"/>
+              <a:gd name="adj" fmla="val 9571"/>
             </a:avLst>
           </a:prstGeom>
           <a:solidFill>
@@ -9361,8 +9361,8 @@
         </p:nvSpPr>
         <p:spPr>
           <a:xfrm>
-            <a:off x="990600" y="2659311"/>
-            <a:ext cx="5193157" cy="269230"/>
+            <a:off x="990600" y="2659261"/>
+            <a:ext cx="5193157" cy="269180"/>
           </a:xfrm>
           <a:prstGeom prst="rect">
             <a:avLst/>
@@ -9405,8 +9405,8 @@
         </p:nvSpPr>
         <p:spPr>
           <a:xfrm>
-            <a:off x="990600" y="2953941"/>
-            <a:ext cx="5193157" cy="487660"/>
+            <a:off x="990600" y="2953841"/>
+            <a:ext cx="5193157" cy="487561"/>
           </a:xfrm>
           <a:prstGeom prst="rect">
             <a:avLst/>
@@ -9449,12 +9449,12 @@
         </p:nvSpPr>
         <p:spPr>
           <a:xfrm>
-            <a:off x="812800" y="3721001"/>
-            <a:ext cx="5397500" cy="1061690"/>
+            <a:off x="812800" y="3720802"/>
+            <a:ext cx="5397500" cy="1061541"/>
           </a:xfrm>
           <a:prstGeom prst="roundRect">
             <a:avLst>
-              <a:gd name="adj" fmla="val 9570"/>
+              <a:gd name="adj" fmla="val 9571"/>
             </a:avLst>
           </a:prstGeom>
           <a:solidFill>
@@ -9471,8 +9471,8 @@
         </p:nvSpPr>
         <p:spPr>
           <a:xfrm>
-            <a:off x="990600" y="3873401"/>
-            <a:ext cx="5193157" cy="269230"/>
+            <a:off x="990600" y="3873202"/>
+            <a:ext cx="5193157" cy="269180"/>
           </a:xfrm>
           <a:prstGeom prst="rect">
             <a:avLst/>
@@ -9515,8 +9515,8 @@
         </p:nvSpPr>
         <p:spPr>
           <a:xfrm>
-            <a:off x="990600" y="4168031"/>
-            <a:ext cx="5193157" cy="487660"/>
+            <a:off x="990600" y="4167783"/>
+            <a:ext cx="5193157" cy="487561"/>
           </a:xfrm>
           <a:prstGeom prst="rect">
             <a:avLst/>
@@ -9559,7 +9559,7 @@
         </p:nvSpPr>
         <p:spPr>
           <a:xfrm>
-            <a:off x="6467475" y="2510086"/>
+            <a:off x="6467475" y="2510036"/>
             <a:ext cx="4908550" cy="2889250"/>
           </a:xfrm>
           <a:prstGeom prst="roundRect">
@@ -9593,7 +9593,7 @@
         </p:blipFill>
         <p:spPr>
           <a:xfrm>
-            <a:off x="6572250" y="2614861"/>
+            <a:off x="6572250" y="2614811"/>
             <a:ext cx="4699000" cy="2679700"/>
           </a:xfrm>
           <a:prstGeom prst="rect">
@@ -9688,7 +9688,7 @@
         <p:spPr>
           <a:xfrm>
             <a:off x="812800" y="812800"/>
-            <a:ext cx="10883392" cy="528290"/>
+            <a:ext cx="10883392" cy="528241"/>
           </a:xfrm>
           <a:prstGeom prst="rect">
             <a:avLst/>
@@ -9731,12 +9731,12 @@
         </p:nvSpPr>
         <p:spPr>
           <a:xfrm>
-            <a:off x="812800" y="1620490"/>
-            <a:ext cx="3386634" cy="2451001"/>
+            <a:off x="812800" y="1620441"/>
+            <a:ext cx="3386634" cy="2450604"/>
           </a:xfrm>
           <a:prstGeom prst="roundRect">
             <a:avLst>
-              <a:gd name="adj" fmla="val 4145"/>
+              <a:gd name="adj" fmla="val 4146"/>
             </a:avLst>
           </a:prstGeom>
           <a:solidFill>
@@ -9753,8 +9753,8 @@
         </p:nvSpPr>
         <p:spPr>
           <a:xfrm>
-            <a:off x="1041400" y="1849090"/>
-            <a:ext cx="3017317" cy="299690"/>
+            <a:off x="1041400" y="1849041"/>
+            <a:ext cx="3017317" cy="299641"/>
           </a:xfrm>
           <a:prstGeom prst="rect">
             <a:avLst/>
@@ -9797,8 +9797,8 @@
         </p:nvSpPr>
         <p:spPr>
           <a:xfrm>
-            <a:off x="1139444" y="2224980"/>
-            <a:ext cx="2911653" cy="1643311"/>
+            <a:off x="1139444" y="2224881"/>
+            <a:ext cx="2911653" cy="1642963"/>
           </a:xfrm>
           <a:prstGeom prst="rect">
             <a:avLst/>
@@ -9884,12 +9884,12 @@
         </p:nvSpPr>
         <p:spPr>
           <a:xfrm>
-            <a:off x="4402634" y="1620490"/>
-            <a:ext cx="3386683" cy="2451001"/>
+            <a:off x="4402634" y="1620441"/>
+            <a:ext cx="3386634" cy="2450604"/>
           </a:xfrm>
           <a:prstGeom prst="roundRect">
             <a:avLst>
-              <a:gd name="adj" fmla="val 4145"/>
+              <a:gd name="adj" fmla="val 4146"/>
             </a:avLst>
           </a:prstGeom>
           <a:solidFill>
@@ -9906,8 +9906,8 @@
         </p:nvSpPr>
         <p:spPr>
           <a:xfrm>
-            <a:off x="4631234" y="1849090"/>
-            <a:ext cx="3017368" cy="299690"/>
+            <a:off x="4631234" y="1849041"/>
+            <a:ext cx="3017317" cy="299641"/>
           </a:xfrm>
           <a:prstGeom prst="rect">
             <a:avLst/>
@@ -9950,8 +9950,8 @@
         </p:nvSpPr>
         <p:spPr>
           <a:xfrm>
-            <a:off x="4729278" y="2224980"/>
-            <a:ext cx="2911704" cy="1181050"/>
+            <a:off x="4729278" y="2224881"/>
+            <a:ext cx="2911653" cy="1180802"/>
           </a:xfrm>
           <a:prstGeom prst="rect">
             <a:avLst/>
@@ -10037,12 +10037,12 @@
         </p:nvSpPr>
         <p:spPr>
           <a:xfrm>
-            <a:off x="7992517" y="1620490"/>
-            <a:ext cx="3386634" cy="2451001"/>
+            <a:off x="7992467" y="1620441"/>
+            <a:ext cx="3386634" cy="2450604"/>
           </a:xfrm>
           <a:prstGeom prst="roundRect">
             <a:avLst>
-              <a:gd name="adj" fmla="val 4145"/>
+              <a:gd name="adj" fmla="val 4146"/>
             </a:avLst>
           </a:prstGeom>
           <a:solidFill>
@@ -10059,8 +10059,8 @@
         </p:nvSpPr>
         <p:spPr>
           <a:xfrm>
-            <a:off x="8221117" y="1849090"/>
-            <a:ext cx="3017317" cy="299690"/>
+            <a:off x="8221067" y="1849041"/>
+            <a:ext cx="3017317" cy="299641"/>
           </a:xfrm>
           <a:prstGeom prst="rect">
             <a:avLst/>
@@ -10103,8 +10103,8 @@
         </p:nvSpPr>
         <p:spPr>
           <a:xfrm>
-            <a:off x="8319161" y="2224980"/>
-            <a:ext cx="2911653" cy="1181050"/>
+            <a:off x="8319111" y="2224881"/>
+            <a:ext cx="2911653" cy="1180802"/>
           </a:xfrm>
           <a:prstGeom prst="rect">
             <a:avLst/>
@@ -10211,8 +10211,8 @@
         </p:nvSpPr>
         <p:spPr>
           <a:xfrm>
-            <a:off x="812800" y="4376291"/>
-            <a:ext cx="10883392" cy="274290"/>
+            <a:off x="812800" y="4375845"/>
+            <a:ext cx="10883392" cy="274241"/>
           </a:xfrm>
           <a:prstGeom prst="rect">
             <a:avLst/>
